--- a/ppt/第6课_机器人AI模块.pptx
+++ b/ppt/第6课_机器人AI模块.pptx
@@ -6,14 +6,14 @@
     <p:sldMasterId id="2147483655" r:id="rId3"/>
   </p:sldMasterIdLst>
   <p:notesMasterIdLst>
-    <p:notesMasterId r:id="rId5"/>
+    <p:notesMasterId r:id="rId6"/>
   </p:notesMasterIdLst>
   <p:handoutMasterIdLst>
     <p:handoutMasterId r:id="rId22"/>
   </p:handoutMasterIdLst>
   <p:sldIdLst>
-    <p:sldId id="322" r:id="rId4"/>
-    <p:sldId id="364" r:id="rId6"/>
+    <p:sldId id="463" r:id="rId4"/>
+    <p:sldId id="364" r:id="rId5"/>
     <p:sldId id="451" r:id="rId7"/>
     <p:sldId id="450" r:id="rId8"/>
     <p:sldId id="452" r:id="rId9"/>
@@ -1281,84 +1281,6 @@
 </p:notes>
 </file>
 
-<file path=ppt/notesSlides/notesSlide17.xml><?xml version="1.0" encoding="utf-8"?>
-<p:notes xmlns:a="http://schemas.openxmlformats.org/drawingml/2006/main" xmlns:r="http://schemas.openxmlformats.org/officeDocument/2006/relationships" xmlns:p="http://schemas.openxmlformats.org/presentationml/2006/main">
-  <p:cSld>
-    <p:spTree>
-      <p:nvGrpSpPr>
-        <p:cNvPr id="1" name=""/>
-        <p:cNvGrpSpPr/>
-        <p:nvPr/>
-      </p:nvGrpSpPr>
-      <p:grpSpPr>
-        <a:xfrm>
-          <a:off x="0" y="0"/>
-          <a:ext cx="0" cy="0"/>
-          <a:chOff x="0" y="0"/>
-          <a:chExt cx="0" cy="0"/>
-        </a:xfrm>
-      </p:grpSpPr>
-      <p:sp>
-        <p:nvSpPr>
-          <p:cNvPr id="2" name="幻灯片图像占位符 1"/>
-          <p:cNvSpPr>
-            <a:spLocks noGrp="1" noRot="1" noChangeAspect="1"/>
-          </p:cNvSpPr>
-          <p:nvPr>
-            <p:ph type="sldImg"/>
-          </p:nvPr>
-        </p:nvSpPr>
-        <p:spPr/>
-      </p:sp>
-      <p:sp>
-        <p:nvSpPr>
-          <p:cNvPr id="3" name="备注占位符 2"/>
-          <p:cNvSpPr>
-            <a:spLocks noGrp="1"/>
-          </p:cNvSpPr>
-          <p:nvPr>
-            <p:ph type="body" idx="1"/>
-          </p:nvPr>
-        </p:nvSpPr>
-        <p:spPr/>
-        <p:txBody>
-          <a:bodyPr/>
-          <a:lstStyle/>
-          <a:p>
-            <a:endParaRPr lang="zh-CN" altLang="en-US" dirty="0"/>
-          </a:p>
-        </p:txBody>
-      </p:sp>
-      <p:sp>
-        <p:nvSpPr>
-          <p:cNvPr id="4" name="灯片编号占位符 3"/>
-          <p:cNvSpPr>
-            <a:spLocks noGrp="1"/>
-          </p:cNvSpPr>
-          <p:nvPr>
-            <p:ph type="sldNum" sz="quarter" idx="10"/>
-          </p:nvPr>
-        </p:nvSpPr>
-        <p:spPr/>
-        <p:txBody>
-          <a:bodyPr/>
-          <a:lstStyle/>
-          <a:p>
-            <a:fld id="{CD629C50-E8D2-44C1-A6BB-3798535718E9}" type="slidenum">
-              <a:rPr lang="zh-CN" altLang="en-US" smtClean="0"/>
-            </a:fld>
-            <a:endParaRPr lang="zh-CN" altLang="en-US"/>
-          </a:p>
-        </p:txBody>
-      </p:sp>
-    </p:spTree>
-  </p:cSld>
-  <p:clrMapOvr>
-    <a:masterClrMapping/>
-  </p:clrMapOvr>
-</p:notes>
-</file>
-
 <file path=ppt/notesSlides/notesSlide2.xml><?xml version="1.0" encoding="utf-8"?>
 <p:notes xmlns:a="http://schemas.openxmlformats.org/drawingml/2006/main" xmlns:r="http://schemas.openxmlformats.org/officeDocument/2006/relationships" xmlns:p="http://schemas.openxmlformats.org/presentationml/2006/main">
   <p:cSld>
@@ -4275,6 +4197,109 @@
       </p:par>
     </p:tnLst>
   </p:timing>
+</p:sldLayout>
+</file>
+
+<file path=ppt/slideLayouts/slideLayout15.xml><?xml version="1.0" encoding="utf-8"?>
+<p:sldLayout xmlns:a="http://schemas.openxmlformats.org/drawingml/2006/main" xmlns:r="http://schemas.openxmlformats.org/officeDocument/2006/relationships" xmlns:p="http://schemas.openxmlformats.org/presentationml/2006/main" type="blank" preserve="1">
+  <p:cSld name="1_空白">
+    <p:spTree>
+      <p:nvGrpSpPr>
+        <p:cNvPr id="1" name=""/>
+        <p:cNvGrpSpPr/>
+        <p:nvPr/>
+      </p:nvGrpSpPr>
+      <p:grpSpPr>
+        <a:xfrm>
+          <a:off x="0" y="0"/>
+          <a:ext cx="0" cy="0"/>
+          <a:chOff x="0" y="0"/>
+          <a:chExt cx="0" cy="0"/>
+        </a:xfrm>
+      </p:grpSpPr>
+      <p:sp>
+        <p:nvSpPr>
+          <p:cNvPr id="2" name="日期占位符 1"/>
+          <p:cNvSpPr>
+            <a:spLocks noGrp="1"/>
+          </p:cNvSpPr>
+          <p:nvPr>
+            <p:ph type="dt" sz="half" idx="10"/>
+          </p:nvPr>
+        </p:nvSpPr>
+        <p:spPr>
+          <a:xfrm>
+            <a:off x="838200" y="6356350"/>
+            <a:ext cx="2743200" cy="365125"/>
+          </a:xfrm>
+        </p:spPr>
+        <p:txBody>
+          <a:bodyPr/>
+          <a:lstStyle/>
+          <a:p>
+            <a:fld id="{82F288E0-7875-42C4-84C8-98DBBD3BF4D2}" type="datetimeFigureOut">
+              <a:rPr lang="zh-CN" altLang="en-US" smtClean="0"/>
+            </a:fld>
+            <a:endParaRPr lang="zh-CN" altLang="en-US"/>
+          </a:p>
+        </p:txBody>
+      </p:sp>
+      <p:sp>
+        <p:nvSpPr>
+          <p:cNvPr id="3" name="页脚占位符 2"/>
+          <p:cNvSpPr>
+            <a:spLocks noGrp="1"/>
+          </p:cNvSpPr>
+          <p:nvPr>
+            <p:ph type="ftr" sz="quarter" idx="11"/>
+          </p:nvPr>
+        </p:nvSpPr>
+        <p:spPr>
+          <a:xfrm>
+            <a:off x="4038600" y="6356350"/>
+            <a:ext cx="4114800" cy="365125"/>
+          </a:xfrm>
+        </p:spPr>
+        <p:txBody>
+          <a:bodyPr/>
+          <a:lstStyle/>
+          <a:p>
+            <a:endParaRPr lang="zh-CN" altLang="en-US"/>
+          </a:p>
+        </p:txBody>
+      </p:sp>
+      <p:sp>
+        <p:nvSpPr>
+          <p:cNvPr id="4" name="灯片编号占位符 3"/>
+          <p:cNvSpPr>
+            <a:spLocks noGrp="1"/>
+          </p:cNvSpPr>
+          <p:nvPr>
+            <p:ph type="sldNum" sz="quarter" idx="12"/>
+          </p:nvPr>
+        </p:nvSpPr>
+        <p:spPr>
+          <a:xfrm>
+            <a:off x="8610600" y="6356350"/>
+            <a:ext cx="2743200" cy="365125"/>
+          </a:xfrm>
+        </p:spPr>
+        <p:txBody>
+          <a:bodyPr/>
+          <a:lstStyle/>
+          <a:p>
+            <a:fld id="{7D9BB5D0-35E4-459D-AEF3-FE4D7C45CC19}" type="slidenum">
+              <a:rPr lang="zh-CN" altLang="en-US" smtClean="0"/>
+            </a:fld>
+            <a:endParaRPr lang="zh-CN" altLang="en-US"/>
+          </a:p>
+        </p:txBody>
+      </p:sp>
+    </p:spTree>
+  </p:cSld>
+  <p:clrMapOvr>
+    <a:masterClrMapping/>
+  </p:clrMapOvr>
 </p:sldLayout>
 </file>
 
@@ -7693,6 +7718,7 @@
     <p:sldLayoutId id="2147483661" r:id="rId6"/>
     <p:sldLayoutId id="2147483662" r:id="rId7"/>
     <p:sldLayoutId id="2147483663" r:id="rId8"/>
+    <p:sldLayoutId id="2147483664" r:id="rId9"/>
   </p:sldLayoutIdLst>
   <p:timing>
     <p:tnLst>
@@ -7987,20 +8013,24 @@
 <file path=ppt/slides/slide1.xml><?xml version="1.0" encoding="utf-8"?>
 <p:sld xmlns:a="http://schemas.openxmlformats.org/drawingml/2006/main" xmlns:r="http://schemas.openxmlformats.org/officeDocument/2006/relationships" xmlns:p="http://schemas.openxmlformats.org/presentationml/2006/main">
   <p:cSld>
+    <p:bg>
+      <p:bgPr>
+        <a:blipFill rotWithShape="1">
+          <a:blip r:embed="rId1"/>
+          <a:stretch>
+            <a:fillRect/>
+          </a:stretch>
+        </a:blipFill>
+        <a:effectLst/>
+      </p:bgPr>
+    </p:bg>
     <p:spTree>
       <p:nvGrpSpPr>
         <p:cNvPr id="1" name=""/>
         <p:cNvGrpSpPr/>
         <p:nvPr/>
       </p:nvGrpSpPr>
-      <p:grpSpPr>
-        <a:xfrm>
-          <a:off x="0" y="0"/>
-          <a:ext cx="0" cy="0"/>
-          <a:chOff x="0" y="0"/>
-          <a:chExt cx="0" cy="0"/>
-        </a:xfrm>
-      </p:grpSpPr>
+      <p:grpSpPr/>
       <p:sp>
         <p:nvSpPr>
           <p:cNvPr id="5" name="矩形 4"/>
@@ -8009,8 +8039,8 @@
         </p:nvSpPr>
         <p:spPr>
           <a:xfrm>
-            <a:off x="1894616" y="2431690"/>
-            <a:ext cx="7804514" cy="1106805"/>
+            <a:off x="2610485" y="2600960"/>
+            <a:ext cx="6971665" cy="1106805"/>
           </a:xfrm>
           <a:prstGeom prst="rect">
             <a:avLst/>
@@ -8088,18 +8118,55 @@
           </a:p>
         </p:txBody>
       </p:sp>
+      <p:sp>
+        <p:nvSpPr>
+          <p:cNvPr id="2" name="文本框 1"/>
+          <p:cNvSpPr txBox="1"/>
+          <p:nvPr/>
+        </p:nvSpPr>
+        <p:spPr>
+          <a:xfrm>
+            <a:off x="9265920" y="86360"/>
+            <a:ext cx="2987675" cy="645160"/>
+          </a:xfrm>
+          <a:prstGeom prst="rect">
+            <a:avLst/>
+          </a:prstGeom>
+          <a:noFill/>
+        </p:spPr>
+        <p:txBody>
+          <a:bodyPr wrap="square" rtlCol="0">
+            <a:spAutoFit/>
+          </a:bodyPr>
+          <a:p>
+            <a:r>
+              <a:rPr lang="zh-CN" altLang="en-US"/>
+              <a:t>上海交通大学学生创新</a:t>
+            </a:r>
+            <a:r>
+              <a:rPr lang="zh-CN" altLang="en-US"/>
+              <a:t>中心</a:t>
+            </a:r>
+            <a:endParaRPr lang="zh-CN" altLang="en-US"/>
+          </a:p>
+          <a:p>
+            <a:r>
+              <a:rPr lang="zh-CN" altLang="en-US"/>
+              <a:t>上海仪酷智能科技</a:t>
+            </a:r>
+            <a:r>
+              <a:rPr lang="zh-CN" altLang="en-US"/>
+              <a:t>有限公司</a:t>
+            </a:r>
+            <a:endParaRPr lang="zh-CN" altLang="en-US"/>
+          </a:p>
+        </p:txBody>
+      </p:sp>
     </p:spTree>
   </p:cSld>
   <p:clrMapOvr>
     <a:masterClrMapping/>
   </p:clrMapOvr>
-  <p:timing>
-    <p:tnLst>
-      <p:par>
-        <p:cTn id="1" dur="indefinite" restart="never" nodeType="tmRoot"/>
-      </p:par>
-    </p:tnLst>
-  </p:timing>
 </p:sld>
 </file>
 

--- a/ppt/第6课_机器人AI模块.pptx
+++ b/ppt/第6课_机器人AI模块.pptx
@@ -8866,7 +8866,7 @@
         </p:blipFill>
         <p:spPr>
           <a:xfrm>
-            <a:off x="3919855" y="941070"/>
+            <a:off x="1410335" y="903605"/>
             <a:ext cx="4211320" cy="5484495"/>
           </a:xfrm>
           <a:prstGeom prst="rect">
@@ -8874,6 +8874,172 @@
           </a:prstGeom>
         </p:spPr>
       </p:pic>
+      <p:sp>
+        <p:nvSpPr>
+          <p:cNvPr id="4" name="文本框 3"/>
+          <p:cNvSpPr txBox="1"/>
+          <p:nvPr/>
+        </p:nvSpPr>
+        <p:spPr>
+          <a:xfrm>
+            <a:off x="5938520" y="1136015"/>
+            <a:ext cx="5316855" cy="3479800"/>
+          </a:xfrm>
+          <a:prstGeom prst="rect">
+            <a:avLst/>
+          </a:prstGeom>
+          <a:noFill/>
+        </p:spPr>
+        <p:txBody>
+          <a:bodyPr wrap="square" rtlCol="0">
+            <a:noAutofit/>
+          </a:bodyPr>
+          <a:p>
+            <a:pPr indent="457200"/>
+            <a:r>
+              <a:rPr lang="zh-CN" altLang="en-US"/>
+              <a:t>在多轮对话中，</a:t>
+            </a:r>
+            <a:r>
+              <a:rPr lang="en-US" altLang="zh-CN"/>
+              <a:t>message</a:t>
+            </a:r>
+            <a:r>
+              <a:rPr lang="zh-CN" altLang="en-US"/>
+              <a:t>的开头是</a:t>
+            </a:r>
+            <a:r>
+              <a:rPr lang="en-US" altLang="zh-CN"/>
+              <a:t>system</a:t>
+            </a:r>
+            <a:r>
+              <a:rPr lang="zh-CN" altLang="en-US"/>
+              <a:t>，可以配置一些</a:t>
+            </a:r>
+            <a:r>
+              <a:rPr lang="en-US" altLang="zh-CN"/>
+              <a:t>prompt</a:t>
+            </a:r>
+            <a:r>
+              <a:rPr lang="zh-CN" altLang="en-US"/>
+              <a:t>对大模型做一些设定。</a:t>
+            </a:r>
+            <a:r>
+              <a:rPr lang="en-US" altLang="zh-CN"/>
+              <a:t>system</a:t>
+            </a:r>
+            <a:r>
+              <a:rPr lang="zh-CN" altLang="en-US"/>
+              <a:t>可以</a:t>
+            </a:r>
+            <a:r>
+              <a:rPr lang="zh-CN" altLang="en-US"/>
+              <a:t>为空。</a:t>
+            </a:r>
+            <a:endParaRPr lang="zh-CN" altLang="en-US"/>
+          </a:p>
+          <a:p>
+            <a:pPr indent="457200"/>
+            <a:r>
+              <a:rPr lang="zh-CN" altLang="en-US"/>
+              <a:t>然后是</a:t>
+            </a:r>
+            <a:r>
+              <a:rPr lang="en-US" altLang="zh-CN"/>
+              <a:t>user</a:t>
+            </a:r>
+            <a:r>
+              <a:rPr lang="zh-CN" altLang="en-US"/>
+              <a:t>，由用户输入信息，接着是</a:t>
+            </a:r>
+            <a:r>
+              <a:rPr lang="en-US" altLang="zh-CN"/>
+              <a:t>assistant</a:t>
+            </a:r>
+            <a:r>
+              <a:rPr lang="zh-CN" altLang="en-US"/>
+              <a:t>模型回复，然后再接上</a:t>
+            </a:r>
+            <a:r>
+              <a:rPr lang="en-US" altLang="zh-CN"/>
+              <a:t>user......</a:t>
+            </a:r>
+            <a:r>
+              <a:rPr lang="zh-CN" altLang="en-US"/>
+              <a:t>这样的结构就是一般的对话的</a:t>
+            </a:r>
+            <a:r>
+              <a:rPr lang="en-US" altLang="zh-CN"/>
+              <a:t>message</a:t>
+            </a:r>
+            <a:r>
+              <a:rPr lang="zh-CN" altLang="en-US"/>
+              <a:t>结构。</a:t>
+            </a:r>
+            <a:endParaRPr lang="zh-CN" altLang="en-US"/>
+          </a:p>
+          <a:p>
+            <a:pPr indent="457200"/>
+            <a:r>
+              <a:rPr lang="zh-CN" altLang="en-US"/>
+              <a:t>如果</a:t>
+            </a:r>
+            <a:r>
+              <a:rPr lang="en-US" altLang="zh-CN"/>
+              <a:t>user</a:t>
+            </a:r>
+            <a:r>
+              <a:rPr lang="zh-CN" altLang="en-US"/>
+              <a:t>之后，大模型决定调用工具，那么</a:t>
+            </a:r>
+            <a:r>
+              <a:rPr lang="en-US" altLang="zh-CN"/>
+              <a:t>assistant</a:t>
+            </a:r>
+            <a:r>
+              <a:rPr lang="zh-CN" altLang="en-US"/>
+              <a:t>中会附加需要调用的工具</a:t>
+            </a:r>
+            <a:r>
+              <a:rPr lang="en-US" altLang="zh-CN"/>
+              <a:t>tool_calls</a:t>
+            </a:r>
+            <a:r>
+              <a:rPr lang="zh-CN" altLang="en-US"/>
+              <a:t>与工具调用</a:t>
+            </a:r>
+            <a:r>
+              <a:rPr lang="en-US" altLang="zh-CN"/>
+              <a:t>id</a:t>
+            </a:r>
+            <a:r>
+              <a:rPr lang="zh-CN" altLang="en-US"/>
+              <a:t>，下一个紧跟的必须是</a:t>
+            </a:r>
+            <a:r>
+              <a:rPr lang="en-US" altLang="zh-CN"/>
+              <a:t>tool</a:t>
+            </a:r>
+            <a:r>
+              <a:rPr lang="zh-CN" altLang="en-US"/>
+              <a:t>，即工具调用结果以及调用</a:t>
+            </a:r>
+            <a:r>
+              <a:rPr lang="en-US" altLang="zh-CN"/>
+              <a:t>id</a:t>
+            </a:r>
+            <a:r>
+              <a:rPr lang="zh-CN" altLang="en-US"/>
+              <a:t>。</a:t>
+            </a:r>
+            <a:endParaRPr lang="zh-CN" altLang="en-US"/>
+          </a:p>
+          <a:p>
+            <a:pPr indent="457200"/>
+            <a:endParaRPr lang="zh-CN" altLang="en-US"/>
+          </a:p>
+        </p:txBody>
+      </p:sp>
     </p:spTree>
   </p:cSld>
   <p:clrMapOvr>
